--- a/assets/pptx/catalog-111.pptx
+++ b/assets/pptx/catalog-111.pptx
@@ -3241,7 +3241,7 @@
                 <a:ea typeface="Ebrima"/>
                 <a:cs typeface="Ebrima"/>
               </a:rPr>
-              <a:t>ቅዱስ (3x) እግዚአብሔር (2x)</a:t>
+              <a:t>ቅዱስ 3x እግዚአብሔር 2x</a:t>
             </a:r>
           </a:p>
           <a:p>
@@ -3331,7 +3331,7 @@
                 <a:ea typeface="Ebrima"/>
                 <a:cs typeface="Ebrima"/>
               </a:rPr>
-              <a:t>ቅዱስ (3x) እግዚአብሔር (2x)</a:t>
+              <a:t>ቅዱስ 3x እግዚአብሔር 2x</a:t>
             </a:r>
           </a:p>
           <a:p>
@@ -3349,7 +3349,7 @@
                 <a:ea typeface="Ebrima"/>
                 <a:cs typeface="Ebrima"/>
               </a:rPr>
-              <a:t>በፈቃዴ ደስ እያለኝ ጌታ አመልክሃለሁ (4x)</a:t>
+              <a:t>በፈቃዴ ደስ እያለኝ ጌታ አመልክሃለሁ 4x</a:t>
             </a:r>
           </a:p>
           <a:p>
@@ -3385,7 +3385,7 @@
                 <a:ea typeface="Ebrima"/>
                 <a:cs typeface="Ebrima"/>
               </a:rPr>
-              <a:t>ክበር ጌታ (4x)</a:t>
+              <a:t>ክበር ጌታ 4x</a:t>
             </a:r>
           </a:p>
           <a:p>
@@ -3421,7 +3421,7 @@
                 <a:ea typeface="Ebrima"/>
                 <a:cs typeface="Ebrima"/>
               </a:rPr>
-              <a:t>ንገሥ ጌታ (4x)</a:t>
+              <a:t>ንገሥ ጌታ 4x</a:t>
             </a:r>
           </a:p>
           <a:p>
@@ -3601,7 +3601,7 @@
                 <a:ea typeface="Ebrima"/>
                 <a:cs typeface="Ebrima"/>
               </a:rPr>
-              <a:t>አምላኬ ይገባሃል (2x)</a:t>
+              <a:t>አምላኬ ይገባሃል 2x</a:t>
             </a:r>
           </a:p>
         </p:txBody>
